--- a/assets/theonetrade.pptx
+++ b/assets/theonetrade.pptx
@@ -16138,56 +16138,112 @@
                 <a:cs typeface="JetBrains Mono"/>
                 <a:sym typeface="JetBrains Mono"/>
               </a:rPr>
-              <a:t>  BTC падает до </a:t>
-            </a:r>
+              <a:t>  </a:t>
+            </a:r>
+            <a:endParaRPr b="0" i="0" sz="1500" u="none" cap="none" strike="noStrike">
+              <a:solidFill>
+                <a:srgbClr val="8B9DB5"/>
+              </a:solidFill>
+              <a:latin typeface="JetBrains Mono"/>
+              <a:ea typeface="JetBrains Mono"/>
+              <a:cs typeface="JetBrains Mono"/>
+              <a:sym typeface="JetBrains Mono"/>
+            </a:endParaRPr>
+          </a:p>
+          <a:p>
+            <a:pPr indent="0" lvl="0" marL="0" marR="0" rtl="0" algn="l">
+              <a:lnSpc>
+                <a:spcPct val="175000"/>
+              </a:lnSpc>
+              <a:spcBef>
+                <a:spcPts val="0"/>
+              </a:spcBef>
+              <a:spcAft>
+                <a:spcPts val="0"/>
+              </a:spcAft>
+              <a:buClr>
+                <a:srgbClr val="5A6F87"/>
+              </a:buClr>
+              <a:buSzPts val="1500"/>
+              <a:buFont typeface="JetBrains Mono"/>
+              <a:buNone/>
+            </a:pPr>
             <a:r>
               <a:rPr b="0" i="0" lang="en-US" sz="1500" u="none" cap="none" strike="noStrike">
                 <a:solidFill>
-                  <a:srgbClr val="EAB308"/>
+                  <a:srgbClr val="8B9DB5"/>
                 </a:solidFill>
                 <a:latin typeface="JetBrains Mono"/>
                 <a:ea typeface="JetBrains Mono"/>
                 <a:cs typeface="JetBrains Mono"/>
                 <a:sym typeface="JetBrains Mono"/>
               </a:rPr>
-              <a:t>$87,300 </a:t>
+              <a:t>BTC падает до </a:t>
             </a:r>
             <a:r>
               <a:rPr b="0" i="0" lang="en-US" sz="1500" u="none" cap="none" strike="noStrike">
                 <a:solidFill>
-                  <a:srgbClr val="5A6F87"/>
+                  <a:srgbClr val="EAB308"/>
                 </a:solidFill>
                 <a:latin typeface="JetBrains Mono"/>
                 <a:ea typeface="JetBrains Mono"/>
                 <a:cs typeface="JetBrains Mono"/>
                 <a:sym typeface="JetBrains Mono"/>
               </a:rPr>
-              <a:t>09:00.050</a:t>
+              <a:t>$87,300 </a:t>
             </a:r>
             <a:r>
               <a:rPr b="0" i="0" lang="en-US" sz="1500" u="none" cap="none" strike="noStrike">
                 <a:solidFill>
-                  <a:srgbClr val="8B9DB5"/>
+                  <a:srgbClr val="5A6F87"/>
                 </a:solidFill>
                 <a:latin typeface="JetBrains Mono"/>
                 <a:ea typeface="JetBrains Mono"/>
                 <a:cs typeface="JetBrains Mono"/>
                 <a:sym typeface="JetBrains Mono"/>
               </a:rPr>
-              <a:t>  1000 ботов видят: </a:t>
+              <a:t>09:00.050</a:t>
             </a:r>
             <a:r>
               <a:rPr b="0" i="0" lang="en-US" sz="1500" u="none" cap="none" strike="noStrike">
                 <a:solidFill>
-                  <a:srgbClr val="2DD4A8"/>
+                  <a:srgbClr val="8B9DB5"/>
                 </a:solidFill>
                 <a:latin typeface="JetBrains Mono"/>
                 <a:ea typeface="JetBrains Mono"/>
                 <a:cs typeface="JetBrains Mono"/>
                 <a:sym typeface="JetBrains Mono"/>
               </a:rPr>
-              <a:t>RSI &lt; 30 </a:t>
-            </a:r>
+              <a:t>  </a:t>
+            </a:r>
+            <a:endParaRPr b="0" i="0" sz="1500" u="none" cap="none" strike="noStrike">
+              <a:solidFill>
+                <a:srgbClr val="8B9DB5"/>
+              </a:solidFill>
+              <a:latin typeface="JetBrains Mono"/>
+              <a:ea typeface="JetBrains Mono"/>
+              <a:cs typeface="JetBrains Mono"/>
+              <a:sym typeface="JetBrains Mono"/>
+            </a:endParaRPr>
+          </a:p>
+          <a:p>
+            <a:pPr indent="0" lvl="0" marL="0" marR="0" rtl="0" algn="l">
+              <a:lnSpc>
+                <a:spcPct val="175000"/>
+              </a:lnSpc>
+              <a:spcBef>
+                <a:spcPts val="0"/>
+              </a:spcBef>
+              <a:spcAft>
+                <a:spcPts val="0"/>
+              </a:spcAft>
+              <a:buClr>
+                <a:srgbClr val="5A6F87"/>
+              </a:buClr>
+              <a:buSzPts val="1500"/>
+              <a:buFont typeface="JetBrains Mono"/>
+              <a:buNone/>
+            </a:pPr>
             <a:r>
               <a:rPr b="0" i="0" lang="en-US" sz="1500" u="none" cap="none" strike="noStrike">
                 <a:solidFill>
@@ -16198,19 +16254,19 @@
                 <a:cs typeface="JetBrains Mono"/>
                 <a:sym typeface="JetBrains Mono"/>
               </a:rPr>
-              <a:t>  </a:t>
+              <a:t>1000 ботов видят: </a:t>
             </a:r>
             <a:r>
               <a:rPr b="0" i="0" lang="en-US" sz="1500" u="none" cap="none" strike="noStrike">
                 <a:solidFill>
-                  <a:srgbClr val="5A6F87"/>
+                  <a:srgbClr val="2DD4A8"/>
                 </a:solidFill>
                 <a:latin typeface="JetBrains Mono"/>
                 <a:ea typeface="JetBrains Mono"/>
                 <a:cs typeface="JetBrains Mono"/>
                 <a:sym typeface="JetBrains Mono"/>
               </a:rPr>
-              <a:t>→ «RSI в зоне перепроданности» </a:t>
+              <a:t>RSI &lt; 30 </a:t>
             </a:r>
             <a:r>
               <a:rPr b="0" i="0" lang="en-US" sz="1500" u="none" cap="none" strike="noStrike">
@@ -16222,8 +16278,36 @@
                 <a:cs typeface="JetBrains Mono"/>
                 <a:sym typeface="JetBrains Mono"/>
               </a:rPr>
-              <a:t>   </a:t>
-            </a:r>
+              <a:t>  </a:t>
+            </a:r>
+            <a:endParaRPr b="0" i="0" sz="1500" u="none" cap="none" strike="noStrike">
+              <a:solidFill>
+                <a:srgbClr val="8B9DB5"/>
+              </a:solidFill>
+              <a:latin typeface="JetBrains Mono"/>
+              <a:ea typeface="JetBrains Mono"/>
+              <a:cs typeface="JetBrains Mono"/>
+              <a:sym typeface="JetBrains Mono"/>
+            </a:endParaRPr>
+          </a:p>
+          <a:p>
+            <a:pPr indent="0" lvl="0" marL="0" marR="0" rtl="0" algn="l">
+              <a:lnSpc>
+                <a:spcPct val="175000"/>
+              </a:lnSpc>
+              <a:spcBef>
+                <a:spcPts val="0"/>
+              </a:spcBef>
+              <a:spcAft>
+                <a:spcPts val="0"/>
+              </a:spcAft>
+              <a:buClr>
+                <a:srgbClr val="5A6F87"/>
+              </a:buClr>
+              <a:buSzPts val="1500"/>
+              <a:buFont typeface="JetBrains Mono"/>
+              <a:buNone/>
+            </a:pPr>
             <a:r>
               <a:rPr b="0" i="0" lang="en-US" sz="1500" u="none" cap="none" strike="noStrike">
                 <a:solidFill>
@@ -16234,7 +16318,7 @@
                 <a:cs typeface="JetBrains Mono"/>
                 <a:sym typeface="JetBrains Mono"/>
               </a:rPr>
-              <a:t>→ «Это сигнал на покупку» 09:00.100</a:t>
+              <a:t>→ «RSI в зоне перепроданности» </a:t>
             </a:r>
             <a:r>
               <a:rPr b="0" i="0" lang="en-US" sz="1500" u="none" cap="none" strike="noStrike">
@@ -16246,32 +16330,88 @@
                 <a:cs typeface="JetBrains Mono"/>
                 <a:sym typeface="JetBrains Mono"/>
               </a:rPr>
-              <a:t>  Все отправляют </a:t>
-            </a:r>
+              <a:t>   </a:t>
+            </a:r>
+            <a:endParaRPr b="0" i="0" sz="1500" u="none" cap="none" strike="noStrike">
+              <a:solidFill>
+                <a:srgbClr val="8B9DB5"/>
+              </a:solidFill>
+              <a:latin typeface="JetBrains Mono"/>
+              <a:ea typeface="JetBrains Mono"/>
+              <a:cs typeface="JetBrains Mono"/>
+              <a:sym typeface="JetBrains Mono"/>
+            </a:endParaRPr>
+          </a:p>
+          <a:p>
+            <a:pPr indent="0" lvl="0" marL="0" marR="0" rtl="0" algn="l">
+              <a:lnSpc>
+                <a:spcPct val="175000"/>
+              </a:lnSpc>
+              <a:spcBef>
+                <a:spcPts val="0"/>
+              </a:spcBef>
+              <a:spcAft>
+                <a:spcPts val="0"/>
+              </a:spcAft>
+              <a:buClr>
+                <a:srgbClr val="5A6F87"/>
+              </a:buClr>
+              <a:buSzPts val="1500"/>
+              <a:buFont typeface="JetBrains Mono"/>
+              <a:buNone/>
+            </a:pPr>
             <a:r>
               <a:rPr b="0" i="0" lang="en-US" sz="1500" u="none" cap="none" strike="noStrike">
                 <a:solidFill>
-                  <a:srgbClr val="2DD4A8"/>
+                  <a:srgbClr val="5A6F87"/>
                 </a:solidFill>
                 <a:latin typeface="JetBrains Mono"/>
                 <a:ea typeface="JetBrains Mono"/>
                 <a:cs typeface="JetBrains Mono"/>
                 <a:sym typeface="JetBrains Mono"/>
               </a:rPr>
-              <a:t>BUY </a:t>
+              <a:t>→ «Это сигнал на покупку» 09:00.100</a:t>
             </a:r>
             <a:r>
               <a:rPr b="0" i="0" lang="en-US" sz="1500" u="none" cap="none" strike="noStrike">
                 <a:solidFill>
-                  <a:srgbClr val="5A6F87"/>
+                  <a:srgbClr val="8B9DB5"/>
                 </a:solidFill>
                 <a:latin typeface="JetBrains Mono"/>
                 <a:ea typeface="JetBrains Mono"/>
                 <a:cs typeface="JetBrains Mono"/>
                 <a:sym typeface="JetBrains Mono"/>
               </a:rPr>
-              <a:t>09:00.150</a:t>
-            </a:r>
+              <a:t>  </a:t>
+            </a:r>
+            <a:endParaRPr b="0" i="0" sz="1500" u="none" cap="none" strike="noStrike">
+              <a:solidFill>
+                <a:srgbClr val="8B9DB5"/>
+              </a:solidFill>
+              <a:latin typeface="JetBrains Mono"/>
+              <a:ea typeface="JetBrains Mono"/>
+              <a:cs typeface="JetBrains Mono"/>
+              <a:sym typeface="JetBrains Mono"/>
+            </a:endParaRPr>
+          </a:p>
+          <a:p>
+            <a:pPr indent="0" lvl="0" marL="0" marR="0" rtl="0" algn="l">
+              <a:lnSpc>
+                <a:spcPct val="175000"/>
+              </a:lnSpc>
+              <a:spcBef>
+                <a:spcPts val="0"/>
+              </a:spcBef>
+              <a:spcAft>
+                <a:spcPts val="0"/>
+              </a:spcAft>
+              <a:buClr>
+                <a:srgbClr val="5A6F87"/>
+              </a:buClr>
+              <a:buSzPts val="1500"/>
+              <a:buFont typeface="JetBrains Mono"/>
+              <a:buNone/>
+            </a:pPr>
             <a:r>
               <a:rPr b="0" i="0" lang="en-US" sz="1500" u="none" cap="none" strike="noStrike">
                 <a:solidFill>
@@ -16282,19 +16422,19 @@
                 <a:cs typeface="JetBrains Mono"/>
                 <a:sym typeface="JetBrains Mono"/>
               </a:rPr>
-              <a:t>  Цена прыгает до </a:t>
+              <a:t>Все отправляют </a:t>
             </a:r>
             <a:r>
               <a:rPr b="0" i="0" lang="en-US" sz="1500" u="none" cap="none" strike="noStrike">
                 <a:solidFill>
-                  <a:srgbClr val="EAB308"/>
+                  <a:srgbClr val="2DD4A8"/>
                 </a:solidFill>
                 <a:latin typeface="JetBrains Mono"/>
                 <a:ea typeface="JetBrains Mono"/>
                 <a:cs typeface="JetBrains Mono"/>
                 <a:sym typeface="JetBrains Mono"/>
               </a:rPr>
-              <a:t>$87,450 </a:t>
+              <a:t>BUY </a:t>
             </a:r>
             <a:r>
               <a:rPr b="0" i="0" lang="en-US" sz="1500" u="none" cap="none" strike="noStrike">
@@ -16306,7 +16446,7 @@
                 <a:cs typeface="JetBrains Mono"/>
                 <a:sym typeface="JetBrains Mono"/>
               </a:rPr>
-              <a:t>09:00.200</a:t>
+              <a:t>09:00.150</a:t>
             </a:r>
             <a:r>
               <a:rPr b="0" i="0" lang="en-US" sz="1500" u="none" cap="none" strike="noStrike">
@@ -16318,31 +16458,59 @@
                 <a:cs typeface="JetBrains Mono"/>
                 <a:sym typeface="JetBrains Mono"/>
               </a:rPr>
-              <a:t>  RSI мгновенно = </a:t>
-            </a:r>
+              <a:t>  </a:t>
+            </a:r>
+            <a:endParaRPr b="0" i="0" sz="1500" u="none" cap="none" strike="noStrike">
+              <a:solidFill>
+                <a:srgbClr val="8B9DB5"/>
+              </a:solidFill>
+              <a:latin typeface="JetBrains Mono"/>
+              <a:ea typeface="JetBrains Mono"/>
+              <a:cs typeface="JetBrains Mono"/>
+              <a:sym typeface="JetBrains Mono"/>
+            </a:endParaRPr>
+          </a:p>
+          <a:p>
+            <a:pPr indent="0" lvl="0" marL="0" marR="0" rtl="0" algn="l">
+              <a:lnSpc>
+                <a:spcPct val="175000"/>
+              </a:lnSpc>
+              <a:spcBef>
+                <a:spcPts val="0"/>
+              </a:spcBef>
+              <a:spcAft>
+                <a:spcPts val="0"/>
+              </a:spcAft>
+              <a:buClr>
+                <a:srgbClr val="5A6F87"/>
+              </a:buClr>
+              <a:buSzPts val="1500"/>
+              <a:buFont typeface="JetBrains Mono"/>
+              <a:buNone/>
+            </a:pPr>
             <a:r>
               <a:rPr b="0" i="0" lang="en-US" sz="1500" u="none" cap="none" strike="noStrike">
                 <a:solidFill>
-                  <a:srgbClr val="F87171"/>
+                  <a:srgbClr val="8B9DB5"/>
                 </a:solidFill>
                 <a:latin typeface="JetBrains Mono"/>
                 <a:ea typeface="JetBrains Mono"/>
                 <a:cs typeface="JetBrains Mono"/>
                 <a:sym typeface="JetBrains Mono"/>
               </a:rPr>
-              <a:t>75 </a:t>
+              <a:t>Цена прыгает до </a:t>
             </a:r>
             <a:r>
               <a:rPr b="0" i="0" lang="en-US" sz="1500" u="none" cap="none" strike="noStrike">
                 <a:solidFill>
-                  <a:srgbClr val="8B9DB5"/>
+                  <a:srgbClr val="EAB308"/>
                 </a:solidFill>
                 <a:latin typeface="JetBrains Mono"/>
                 <a:ea typeface="JetBrains Mono"/>
                 <a:cs typeface="JetBrains Mono"/>
                 <a:sym typeface="JetBrains Mono"/>
               </a:rPr>
-              <a:t>  </a:t>
+              <a:t>$87,450 </a:t>
             </a:r>
             <a:r>
               <a:rPr b="0" i="0" lang="en-US" sz="1500" u="none" cap="none" strike="noStrike">
@@ -16354,7 +16522,7 @@
                 <a:cs typeface="JetBrains Mono"/>
                 <a:sym typeface="JetBrains Mono"/>
               </a:rPr>
-              <a:t>→ «RSI в зоне перекупленности» </a:t>
+              <a:t>09:00.200</a:t>
             </a:r>
             <a:r>
               <a:rPr b="0" i="0" lang="en-US" sz="1500" u="none" cap="none" strike="noStrike">
@@ -16366,44 +16534,100 @@
                 <a:cs typeface="JetBrains Mono"/>
                 <a:sym typeface="JetBrains Mono"/>
               </a:rPr>
-              <a:t>   </a:t>
-            </a:r>
+              <a:t>  </a:t>
+            </a:r>
+            <a:endParaRPr b="0" i="0" sz="1500" u="none" cap="none" strike="noStrike">
+              <a:solidFill>
+                <a:srgbClr val="8B9DB5"/>
+              </a:solidFill>
+              <a:latin typeface="JetBrains Mono"/>
+              <a:ea typeface="JetBrains Mono"/>
+              <a:cs typeface="JetBrains Mono"/>
+              <a:sym typeface="JetBrains Mono"/>
+            </a:endParaRPr>
+          </a:p>
+          <a:p>
+            <a:pPr indent="0" lvl="0" marL="0" marR="0" rtl="0" algn="l">
+              <a:lnSpc>
+                <a:spcPct val="175000"/>
+              </a:lnSpc>
+              <a:spcBef>
+                <a:spcPts val="0"/>
+              </a:spcBef>
+              <a:spcAft>
+                <a:spcPts val="0"/>
+              </a:spcAft>
+              <a:buClr>
+                <a:srgbClr val="5A6F87"/>
+              </a:buClr>
+              <a:buSzPts val="1500"/>
+              <a:buFont typeface="JetBrains Mono"/>
+              <a:buNone/>
+            </a:pPr>
             <a:r>
               <a:rPr b="0" i="0" lang="en-US" sz="1500" u="none" cap="none" strike="noStrike">
                 <a:solidFill>
-                  <a:srgbClr val="5A6F87"/>
+                  <a:srgbClr val="8B9DB5"/>
                 </a:solidFill>
                 <a:latin typeface="JetBrains Mono"/>
                 <a:ea typeface="JetBrains Mono"/>
                 <a:cs typeface="JetBrains Mono"/>
                 <a:sym typeface="JetBrains Mono"/>
               </a:rPr>
-              <a:t>→ «Это сигнал на продажу» 09:00.250</a:t>
+              <a:t>RSI мгновенно = </a:t>
             </a:r>
             <a:r>
               <a:rPr b="0" i="0" lang="en-US" sz="1500" u="none" cap="none" strike="noStrike">
                 <a:solidFill>
-                  <a:srgbClr val="8B9DB5"/>
+                  <a:srgbClr val="F87171"/>
                 </a:solidFill>
                 <a:latin typeface="JetBrains Mono"/>
                 <a:ea typeface="JetBrains Mono"/>
                 <a:cs typeface="JetBrains Mono"/>
                 <a:sym typeface="JetBrains Mono"/>
               </a:rPr>
-              <a:t>  Все отправляют </a:t>
+              <a:t>75 </a:t>
             </a:r>
             <a:r>
               <a:rPr b="0" i="0" lang="en-US" sz="1500" u="none" cap="none" strike="noStrike">
                 <a:solidFill>
-                  <a:srgbClr val="F87171"/>
+                  <a:srgbClr val="8B9DB5"/>
                 </a:solidFill>
                 <a:latin typeface="JetBrains Mono"/>
                 <a:ea typeface="JetBrains Mono"/>
                 <a:cs typeface="JetBrains Mono"/>
                 <a:sym typeface="JetBrains Mono"/>
               </a:rPr>
-              <a:t>SELL </a:t>
-            </a:r>
+              <a:t>  </a:t>
+            </a:r>
+            <a:endParaRPr b="0" i="0" sz="1500" u="none" cap="none" strike="noStrike">
+              <a:solidFill>
+                <a:srgbClr val="8B9DB5"/>
+              </a:solidFill>
+              <a:latin typeface="JetBrains Mono"/>
+              <a:ea typeface="JetBrains Mono"/>
+              <a:cs typeface="JetBrains Mono"/>
+              <a:sym typeface="JetBrains Mono"/>
+            </a:endParaRPr>
+          </a:p>
+          <a:p>
+            <a:pPr indent="0" lvl="0" marL="0" marR="0" rtl="0" algn="l">
+              <a:lnSpc>
+                <a:spcPct val="175000"/>
+              </a:lnSpc>
+              <a:spcBef>
+                <a:spcPts val="0"/>
+              </a:spcBef>
+              <a:spcAft>
+                <a:spcPts val="0"/>
+              </a:spcAft>
+              <a:buClr>
+                <a:srgbClr val="5A6F87"/>
+              </a:buClr>
+              <a:buSzPts val="1500"/>
+              <a:buFont typeface="JetBrains Mono"/>
+              <a:buNone/>
+            </a:pPr>
             <a:r>
               <a:rPr b="0" i="0" lang="en-US" sz="1500" u="none" cap="none" strike="noStrike">
                 <a:solidFill>
@@ -16414,7 +16638,7 @@
                 <a:cs typeface="JetBrains Mono"/>
                 <a:sym typeface="JetBrains Mono"/>
               </a:rPr>
-              <a:t>09:00.300</a:t>
+              <a:t>→ «RSI в зоне перекупленности» </a:t>
             </a:r>
             <a:r>
               <a:rPr b="0" i="0" lang="en-US" sz="1500" u="none" cap="none" strike="noStrike">
@@ -16426,7 +16650,175 @@
                 <a:cs typeface="JetBrains Mono"/>
                 <a:sym typeface="JetBrains Mono"/>
               </a:rPr>
-              <a:t>  Цена обратно: </a:t>
+              <a:t>   </a:t>
+            </a:r>
+            <a:endParaRPr b="0" i="0" sz="1500" u="none" cap="none" strike="noStrike">
+              <a:solidFill>
+                <a:srgbClr val="8B9DB5"/>
+              </a:solidFill>
+              <a:latin typeface="JetBrains Mono"/>
+              <a:ea typeface="JetBrains Mono"/>
+              <a:cs typeface="JetBrains Mono"/>
+              <a:sym typeface="JetBrains Mono"/>
+            </a:endParaRPr>
+          </a:p>
+          <a:p>
+            <a:pPr indent="0" lvl="0" marL="0" marR="0" rtl="0" algn="l">
+              <a:lnSpc>
+                <a:spcPct val="175000"/>
+              </a:lnSpc>
+              <a:spcBef>
+                <a:spcPts val="0"/>
+              </a:spcBef>
+              <a:spcAft>
+                <a:spcPts val="0"/>
+              </a:spcAft>
+              <a:buClr>
+                <a:srgbClr val="5A6F87"/>
+              </a:buClr>
+              <a:buSzPts val="1500"/>
+              <a:buFont typeface="JetBrains Mono"/>
+              <a:buNone/>
+            </a:pPr>
+            <a:r>
+              <a:rPr b="0" i="0" lang="en-US" sz="1500" u="none" cap="none" strike="noStrike">
+                <a:solidFill>
+                  <a:srgbClr val="5A6F87"/>
+                </a:solidFill>
+                <a:latin typeface="JetBrains Mono"/>
+                <a:ea typeface="JetBrains Mono"/>
+                <a:cs typeface="JetBrains Mono"/>
+                <a:sym typeface="JetBrains Mono"/>
+              </a:rPr>
+              <a:t>→ «Это сигнал на продажу» 09:00.250</a:t>
+            </a:r>
+            <a:r>
+              <a:rPr b="0" i="0" lang="en-US" sz="1500" u="none" cap="none" strike="noStrike">
+                <a:solidFill>
+                  <a:srgbClr val="8B9DB5"/>
+                </a:solidFill>
+                <a:latin typeface="JetBrains Mono"/>
+                <a:ea typeface="JetBrains Mono"/>
+                <a:cs typeface="JetBrains Mono"/>
+                <a:sym typeface="JetBrains Mono"/>
+              </a:rPr>
+              <a:t>  </a:t>
+            </a:r>
+            <a:endParaRPr b="0" i="0" sz="1500" u="none" cap="none" strike="noStrike">
+              <a:solidFill>
+                <a:srgbClr val="8B9DB5"/>
+              </a:solidFill>
+              <a:latin typeface="JetBrains Mono"/>
+              <a:ea typeface="JetBrains Mono"/>
+              <a:cs typeface="JetBrains Mono"/>
+              <a:sym typeface="JetBrains Mono"/>
+            </a:endParaRPr>
+          </a:p>
+          <a:p>
+            <a:pPr indent="0" lvl="0" marL="0" marR="0" rtl="0" algn="l">
+              <a:lnSpc>
+                <a:spcPct val="175000"/>
+              </a:lnSpc>
+              <a:spcBef>
+                <a:spcPts val="0"/>
+              </a:spcBef>
+              <a:spcAft>
+                <a:spcPts val="0"/>
+              </a:spcAft>
+              <a:buClr>
+                <a:srgbClr val="5A6F87"/>
+              </a:buClr>
+              <a:buSzPts val="1500"/>
+              <a:buFont typeface="JetBrains Mono"/>
+              <a:buNone/>
+            </a:pPr>
+            <a:r>
+              <a:rPr b="0" i="0" lang="en-US" sz="1500" u="none" cap="none" strike="noStrike">
+                <a:solidFill>
+                  <a:srgbClr val="8B9DB5"/>
+                </a:solidFill>
+                <a:latin typeface="JetBrains Mono"/>
+                <a:ea typeface="JetBrains Mono"/>
+                <a:cs typeface="JetBrains Mono"/>
+                <a:sym typeface="JetBrains Mono"/>
+              </a:rPr>
+              <a:t>Все отправляют </a:t>
+            </a:r>
+            <a:r>
+              <a:rPr b="0" i="0" lang="en-US" sz="1500" u="none" cap="none" strike="noStrike">
+                <a:solidFill>
+                  <a:srgbClr val="F87171"/>
+                </a:solidFill>
+                <a:latin typeface="JetBrains Mono"/>
+                <a:ea typeface="JetBrains Mono"/>
+                <a:cs typeface="JetBrains Mono"/>
+                <a:sym typeface="JetBrains Mono"/>
+              </a:rPr>
+              <a:t>SELL </a:t>
+            </a:r>
+            <a:r>
+              <a:rPr b="0" i="0" lang="en-US" sz="1500" u="none" cap="none" strike="noStrike">
+                <a:solidFill>
+                  <a:srgbClr val="5A6F87"/>
+                </a:solidFill>
+                <a:latin typeface="JetBrains Mono"/>
+                <a:ea typeface="JetBrains Mono"/>
+                <a:cs typeface="JetBrains Mono"/>
+                <a:sym typeface="JetBrains Mono"/>
+              </a:rPr>
+              <a:t>09:00.300</a:t>
+            </a:r>
+            <a:r>
+              <a:rPr b="0" i="0" lang="en-US" sz="1500" u="none" cap="none" strike="noStrike">
+                <a:solidFill>
+                  <a:srgbClr val="8B9DB5"/>
+                </a:solidFill>
+                <a:latin typeface="JetBrains Mono"/>
+                <a:ea typeface="JetBrains Mono"/>
+                <a:cs typeface="JetBrains Mono"/>
+                <a:sym typeface="JetBrains Mono"/>
+              </a:rPr>
+              <a:t>  </a:t>
+            </a:r>
+            <a:endParaRPr b="0" i="0" sz="1500" u="none" cap="none" strike="noStrike">
+              <a:solidFill>
+                <a:srgbClr val="8B9DB5"/>
+              </a:solidFill>
+              <a:latin typeface="JetBrains Mono"/>
+              <a:ea typeface="JetBrains Mono"/>
+              <a:cs typeface="JetBrains Mono"/>
+              <a:sym typeface="JetBrains Mono"/>
+            </a:endParaRPr>
+          </a:p>
+          <a:p>
+            <a:pPr indent="0" lvl="0" marL="0" marR="0" rtl="0" algn="l">
+              <a:lnSpc>
+                <a:spcPct val="175000"/>
+              </a:lnSpc>
+              <a:spcBef>
+                <a:spcPts val="0"/>
+              </a:spcBef>
+              <a:spcAft>
+                <a:spcPts val="0"/>
+              </a:spcAft>
+              <a:buClr>
+                <a:srgbClr val="5A6F87"/>
+              </a:buClr>
+              <a:buSzPts val="1500"/>
+              <a:buFont typeface="JetBrains Mono"/>
+              <a:buNone/>
+            </a:pPr>
+            <a:r>
+              <a:rPr b="0" i="0" lang="en-US" sz="1500" u="none" cap="none" strike="noStrike">
+                <a:solidFill>
+                  <a:srgbClr val="8B9DB5"/>
+                </a:solidFill>
+                <a:latin typeface="JetBrains Mono"/>
+                <a:ea typeface="JetBrains Mono"/>
+                <a:cs typeface="JetBrains Mono"/>
+                <a:sym typeface="JetBrains Mono"/>
+              </a:rPr>
+              <a:t>Цена обратно: </a:t>
             </a:r>
             <a:r>
               <a:rPr b="0" i="0" lang="en-US" sz="1500" u="none" cap="none" strike="noStrike">
@@ -17368,7 +17760,7 @@
         </p:nvSpPr>
         <p:spPr>
           <a:xfrm>
-            <a:off x="1047750" y="3997138"/>
+            <a:off x="1047750" y="4219961"/>
             <a:ext cx="8829600" cy="2866500"/>
           </a:xfrm>
           <a:prstGeom prst="rect">
@@ -17925,8 +18317,76 @@
                 <a:cs typeface="JetBrains Mono"/>
                 <a:sym typeface="JetBrains Mono"/>
               </a:rPr>
-              <a:t>// Нет параметров timestamp. // Контекст передаётся автоматически. </a:t>
-            </a:r>
+              <a:t>// Нет параметров timestamp. </a:t>
+            </a:r>
+            <a:endParaRPr b="0" i="0" sz="1500" u="none" cap="none" strike="noStrike">
+              <a:solidFill>
+                <a:srgbClr val="5A6F87"/>
+              </a:solidFill>
+              <a:latin typeface="JetBrains Mono"/>
+              <a:ea typeface="JetBrains Mono"/>
+              <a:cs typeface="JetBrains Mono"/>
+              <a:sym typeface="JetBrains Mono"/>
+            </a:endParaRPr>
+          </a:p>
+          <a:p>
+            <a:pPr indent="0" lvl="0" marL="0" marR="0" rtl="0" algn="l">
+              <a:lnSpc>
+                <a:spcPct val="170000"/>
+              </a:lnSpc>
+              <a:spcBef>
+                <a:spcPts val="0"/>
+              </a:spcBef>
+              <a:spcAft>
+                <a:spcPts val="0"/>
+              </a:spcAft>
+              <a:buClr>
+                <a:srgbClr val="5A6F87"/>
+              </a:buClr>
+              <a:buSzPts val="1500"/>
+              <a:buFont typeface="JetBrains Mono"/>
+              <a:buNone/>
+            </a:pPr>
+            <a:r>
+              <a:rPr b="0" i="0" lang="en-US" sz="1500" u="none" cap="none" strike="noStrike">
+                <a:solidFill>
+                  <a:srgbClr val="5A6F87"/>
+                </a:solidFill>
+                <a:latin typeface="JetBrains Mono"/>
+                <a:ea typeface="JetBrains Mono"/>
+                <a:cs typeface="JetBrains Mono"/>
+                <a:sym typeface="JetBrains Mono"/>
+              </a:rPr>
+              <a:t>// Контекст передаётся автоматически. </a:t>
+            </a:r>
+            <a:endParaRPr b="0" i="0" sz="1500" u="none" cap="none" strike="noStrike">
+              <a:solidFill>
+                <a:srgbClr val="5A6F87"/>
+              </a:solidFill>
+              <a:latin typeface="JetBrains Mono"/>
+              <a:ea typeface="JetBrains Mono"/>
+              <a:cs typeface="JetBrains Mono"/>
+              <a:sym typeface="JetBrains Mono"/>
+            </a:endParaRPr>
+          </a:p>
+          <a:p>
+            <a:pPr indent="0" lvl="0" marL="0" marR="0" rtl="0" algn="l">
+              <a:lnSpc>
+                <a:spcPct val="170000"/>
+              </a:lnSpc>
+              <a:spcBef>
+                <a:spcPts val="0"/>
+              </a:spcBef>
+              <a:spcAft>
+                <a:spcPts val="0"/>
+              </a:spcAft>
+              <a:buClr>
+                <a:srgbClr val="5A6F87"/>
+              </a:buClr>
+              <a:buSzPts val="1500"/>
+              <a:buFont typeface="JetBrains Mono"/>
+              <a:buNone/>
+            </a:pPr>
             <a:r>
               <a:rPr b="0" i="0" lang="en-US" sz="1500" u="none" cap="none" strike="noStrike">
                 <a:solidFill>
@@ -18035,6 +18495,37 @@
               </a:rPr>
               <a:t>,  100); </a:t>
             </a:r>
+            <a:endParaRPr b="0" i="0" sz="1500" u="none" cap="none" strike="noStrike">
+              <a:solidFill>
+                <a:srgbClr val="8B9DB5"/>
+              </a:solidFill>
+              <a:highlight>
+                <a:srgbClr val="131A24"/>
+              </a:highlight>
+              <a:latin typeface="JetBrains Mono"/>
+              <a:ea typeface="JetBrains Mono"/>
+              <a:cs typeface="JetBrains Mono"/>
+              <a:sym typeface="JetBrains Mono"/>
+            </a:endParaRPr>
+          </a:p>
+          <a:p>
+            <a:pPr indent="0" lvl="0" marL="0" marR="0" rtl="0" algn="l">
+              <a:lnSpc>
+                <a:spcPct val="170000"/>
+              </a:lnSpc>
+              <a:spcBef>
+                <a:spcPts val="0"/>
+              </a:spcBef>
+              <a:spcAft>
+                <a:spcPts val="0"/>
+              </a:spcAft>
+              <a:buClr>
+                <a:srgbClr val="5A6F87"/>
+              </a:buClr>
+              <a:buSzPts val="1500"/>
+              <a:buFont typeface="JetBrains Mono"/>
+              <a:buNone/>
+            </a:pPr>
             <a:r>
               <a:rPr b="0" i="0" lang="en-US" sz="1500" u="none" cap="none" strike="noStrike">
                 <a:solidFill>
@@ -18143,6 +18634,37 @@
               </a:rPr>
               <a:t>, 100); </a:t>
             </a:r>
+            <a:endParaRPr b="0" i="0" sz="1500" u="none" cap="none" strike="noStrike">
+              <a:solidFill>
+                <a:srgbClr val="8B9DB5"/>
+              </a:solidFill>
+              <a:highlight>
+                <a:srgbClr val="131A24"/>
+              </a:highlight>
+              <a:latin typeface="JetBrains Mono"/>
+              <a:ea typeface="JetBrains Mono"/>
+              <a:cs typeface="JetBrains Mono"/>
+              <a:sym typeface="JetBrains Mono"/>
+            </a:endParaRPr>
+          </a:p>
+          <a:p>
+            <a:pPr indent="0" lvl="0" marL="0" marR="0" rtl="0" algn="l">
+              <a:lnSpc>
+                <a:spcPct val="170000"/>
+              </a:lnSpc>
+              <a:spcBef>
+                <a:spcPts val="0"/>
+              </a:spcBef>
+              <a:spcAft>
+                <a:spcPts val="0"/>
+              </a:spcAft>
+              <a:buClr>
+                <a:srgbClr val="5A6F87"/>
+              </a:buClr>
+              <a:buSzPts val="1500"/>
+              <a:buFont typeface="JetBrains Mono"/>
+              <a:buNone/>
+            </a:pPr>
             <a:r>
               <a:rPr b="0" i="0" lang="en-US" sz="1500" u="none" cap="none" strike="noStrike">
                 <a:solidFill>
@@ -18251,6 +18773,37 @@
               </a:rPr>
               <a:t>,  100); </a:t>
             </a:r>
+            <a:endParaRPr b="0" i="0" sz="1500" u="none" cap="none" strike="noStrike">
+              <a:solidFill>
+                <a:srgbClr val="8B9DB5"/>
+              </a:solidFill>
+              <a:highlight>
+                <a:srgbClr val="131A24"/>
+              </a:highlight>
+              <a:latin typeface="JetBrains Mono"/>
+              <a:ea typeface="JetBrains Mono"/>
+              <a:cs typeface="JetBrains Mono"/>
+              <a:sym typeface="JetBrains Mono"/>
+            </a:endParaRPr>
+          </a:p>
+          <a:p>
+            <a:pPr indent="0" lvl="0" marL="0" marR="0" rtl="0" algn="l">
+              <a:lnSpc>
+                <a:spcPct val="170000"/>
+              </a:lnSpc>
+              <a:spcBef>
+                <a:spcPts val="0"/>
+              </a:spcBef>
+              <a:spcAft>
+                <a:spcPts val="0"/>
+              </a:spcAft>
+              <a:buClr>
+                <a:srgbClr val="5A6F87"/>
+              </a:buClr>
+              <a:buSzPts val="1500"/>
+              <a:buFont typeface="JetBrains Mono"/>
+              <a:buNone/>
+            </a:pPr>
             <a:r>
               <a:rPr b="0" i="0" lang="en-US" sz="1500" u="none" cap="none" strike="noStrike">
                 <a:solidFill>
@@ -18261,7 +18814,47 @@
                 <a:cs typeface="JetBrains Mono"/>
                 <a:sym typeface="JetBrains Mono"/>
               </a:rPr>
-              <a:t>// → все три синхронизированы //   к одному тику бэктеста</a:t>
+              <a:t>// → все три синхронизированы </a:t>
+            </a:r>
+            <a:endParaRPr b="0" i="0" sz="1500" u="none" cap="none" strike="noStrike">
+              <a:solidFill>
+                <a:srgbClr val="5A6F87"/>
+              </a:solidFill>
+              <a:latin typeface="JetBrains Mono"/>
+              <a:ea typeface="JetBrains Mono"/>
+              <a:cs typeface="JetBrains Mono"/>
+              <a:sym typeface="JetBrains Mono"/>
+            </a:endParaRPr>
+          </a:p>
+          <a:p>
+            <a:pPr indent="0" lvl="0" marL="0" marR="0" rtl="0" algn="l">
+              <a:lnSpc>
+                <a:spcPct val="170000"/>
+              </a:lnSpc>
+              <a:spcBef>
+                <a:spcPts val="0"/>
+              </a:spcBef>
+              <a:spcAft>
+                <a:spcPts val="0"/>
+              </a:spcAft>
+              <a:buClr>
+                <a:srgbClr val="5A6F87"/>
+              </a:buClr>
+              <a:buSzPts val="1500"/>
+              <a:buFont typeface="JetBrains Mono"/>
+              <a:buNone/>
+            </a:pPr>
+            <a:r>
+              <a:rPr b="0" i="0" lang="en-US" sz="1500" u="none" cap="none" strike="noStrike">
+                <a:solidFill>
+                  <a:srgbClr val="5A6F87"/>
+                </a:solidFill>
+                <a:latin typeface="JetBrains Mono"/>
+                <a:ea typeface="JetBrains Mono"/>
+                <a:cs typeface="JetBrains Mono"/>
+                <a:sym typeface="JetBrains Mono"/>
+              </a:rPr>
+              <a:t>//   к одному тику бэктеста</a:t>
             </a:r>
             <a:endParaRPr b="0" i="0" sz="1500" u="none" cap="none" strike="noStrike">
               <a:solidFill>
@@ -19608,8 +20201,8 @@
         </p:nvSpPr>
         <p:spPr>
           <a:xfrm>
-            <a:off x="1047750" y="4134148"/>
-            <a:ext cx="8103679" cy="1691283"/>
+            <a:off x="1047750" y="3960841"/>
+            <a:ext cx="8103600" cy="1691400"/>
           </a:xfrm>
           <a:prstGeom prst="rect">
             <a:avLst/>
@@ -19674,8 +20267,8 @@
         </p:nvSpPr>
         <p:spPr>
           <a:xfrm>
-            <a:off x="1047750" y="5977830"/>
-            <a:ext cx="8103679" cy="1277987"/>
+            <a:off x="1047750" y="5903556"/>
+            <a:ext cx="8103600" cy="1278000"/>
           </a:xfrm>
           <a:prstGeom prst="rect">
             <a:avLst/>

--- a/assets/theonetrade.pptx
+++ b/assets/theonetrade.pptx
@@ -17682,8 +17682,8 @@
         </p:nvSpPr>
         <p:spPr>
           <a:xfrm>
-            <a:off x="1047750" y="2153157"/>
-            <a:ext cx="12685200" cy="1615500"/>
+            <a:off x="1047750" y="2153150"/>
+            <a:ext cx="16304700" cy="1615500"/>
           </a:xfrm>
           <a:prstGeom prst="rect">
             <a:avLst/>
@@ -17726,7 +17726,7 @@
                 <a:cs typeface="Arial"/>
                 <a:sym typeface="Arial"/>
               </a:rPr>
-              <a:t>Четыре инженерных решения, которые</a:t>
+              <a:t>Четыре инженерных решения, которые </a:t>
             </a:r>
             <a:r>
               <a:rPr b="1" i="0" lang="en-US" sz="5400" u="none" cap="none" strike="noStrike">
